--- a/level4/slides/Level4_Lesson12_Slides.pptx
+++ b/level4/slides/Level4_Lesson12_Slides.pptx
@@ -1041,12 +1041,12 @@
           <a:lstStyle/>
           <a:p>
             <a:r>
-              <a:t>"Hear it, say it" (3 min): Point to the script line. gonna = going to: "We're gonna turn off your power." Then practice the weak that (it sounds like "thut"): a text that asks. Stress the key words: NEVER, GIFT cards. Practice a calm, firm voice: No, thank you. Goodbye. The class repeats the two lines twice.</a:t>
-            </a:r>
-          </a:p>
-          <a:p>
-            <a:r>
-              <a:t>Reductions: the listening has gonna. Learners need to understand it; they can always say going to.</a:t>
+              <a:t>"Hear it, say it" (3 min): Point to the script line. gonna = going to: "We're going to turn off your power." Then practice the weak that (it sounds like "thut"): a text that asks. Stress the key words: NEVER, GIFT cards. Practice a calm, firm voice: No, thank you. Goodbye. The class repeats the two lines twice.</a:t>
+            </a:r>
+          </a:p>
+          <a:p>
+            <a:r>
+              <a:t>Reductions: the listening says going to. People often say gonna. Learners only need to recognize it.</a:t>
             </a:r>
           </a:p>
           <a:p>
@@ -1486,7 +1486,7 @@
           </a:p>
           <a:p>
             <a:r>
-              <a:t>No speaker? Read the script with a volunteer at a natural, friendly speed, two times. Say gonna and wanna where the script has them.</a:t>
+              <a:t>No speaker? Read the script with a volunteer at a natural, friendly speed, two times. The script says going to and want to. People often say gonna and wanna; learners only need to recognize those words.</a:t>
             </a:r>
           </a:p>
           <a:p>
@@ -1516,7 +1516,7 @@
           </a:p>
           <a:p>
             <a:r>
-              <a:t>Caller: Hello, is this Mrs. Lopez? This is Mike from the electric company. Your bill is late. You must pay today, or we're gonna turn off your power in one hour.</a:t>
+              <a:t>Caller: Hello, is this Mrs. Lopez? This is Mike from the electric company. Your bill is late. You must pay today, or we're going to turn off your power in one hour.</a:t>
             </a:r>
           </a:p>
           <a:p>
@@ -16456,6 +16456,17 @@
               <a:buNone/>
             </a:pPr>
             <a:r>
+              <a:rPr lang="en-US" sz="2000" dirty="0" b="1">
+                <a:solidFill>
+                  <a:srgbClr val="5B3FC4"/>
+                </a:solidFill>
+                <a:latin typeface="Lexend Deca" pitchFamily="34" charset="0"/>
+                <a:ea typeface="Lexend Deca" pitchFamily="34" charset="-122"/>
+                <a:cs typeface="Lexend Deca" pitchFamily="34" charset="-120"/>
+              </a:rPr>
+              <a:t>gonna</a:t>
+            </a:r>
+            <a:r>
               <a:rPr lang="en-US" sz="2000" dirty="0">
                 <a:solidFill>
                   <a:srgbClr val="1B2236"/>
@@ -16464,7 +16475,7 @@
                 <a:ea typeface="Lexend Deca" pitchFamily="34" charset="-122"/>
                 <a:cs typeface="Lexend Deca" pitchFamily="34" charset="-120"/>
               </a:rPr>
-              <a:t>You will hear </a:t>
+              <a:t> is a short form. This listening says </a:t>
             </a:r>
             <a:r>
               <a:rPr lang="en-US" sz="2000" dirty="0" b="1">
@@ -16475,7 +16486,7 @@
                 <a:ea typeface="Lexend Deca" pitchFamily="34" charset="-122"/>
                 <a:cs typeface="Lexend Deca" pitchFamily="34" charset="-120"/>
               </a:rPr>
-              <a:t>gonna</a:t>
+              <a:t>going to</a:t>
             </a:r>
             <a:r>
               <a:rPr lang="en-US" sz="2000" dirty="0">
@@ -16641,7 +16652,7 @@
                 <a:ea typeface="Lexend Deca" pitchFamily="34" charset="-122"/>
                 <a:cs typeface="Lexend Deca" pitchFamily="34" charset="-120"/>
               </a:rPr>
-              <a:t>gonna</a:t>
+              <a:t>going to</a:t>
             </a:r>
             <a:r>
               <a:rPr lang="en-US" sz="1800" dirty="0" b="1">

--- a/level4/slides/Level4_Lesson12_Slides.pptx
+++ b/level4/slides/Level4_Lesson12_Slides.pptx
@@ -536,7 +536,7 @@
           </a:p>
           <a:p>
             <a:r>
-              <a:t>Audio: the listening audio for this lesson (about 1:56) is coming soon. It will use computer-generated voices (Chatterbox TTS cloned from synthetic Kokoro-82M reference clips); no recordings of real people. Until it is ready, read the listening script (in the notes of the Before You Listen slide) with a volunteer. The names and the story are invented.</a:t>
+              <a:t>Audio: synthetic voices, computer-generated (Chatterbox TTS cloned from Kokoro-82M reference clips). No recordings of real people. The names and the story are invented.</a:t>
             </a:r>
           </a:p>
           <a:p>
@@ -1481,7 +1481,7 @@
           </a:p>
           <a:p>
             <a:r>
-              <a:t>The audio (about 1:56) is coming soon. When it is ready, it plays the conversation once; press play again for play 2. Until then, read the listening script (at the end of these notes) with a volunteer.</a:t>
+              <a:t>The audio (L4_L12_listening.mp3, about 2:01) plays the conversation once. Press play again for play 2. A third play is fine if the class needs it.</a:t>
             </a:r>
           </a:p>
           <a:p>
@@ -1491,7 +1491,7 @@
           </a:p>
           <a:p>
             <a:r>
-              <a:t>Audio: the listening audio for this lesson (about 1:56) is coming soon. It will use computer-generated voices (Chatterbox TTS cloned from synthetic Kokoro-82M reference clips); no recordings of real people. Until it is ready, read the listening script (in the notes of the Before You Listen slide) with a volunteer. The names and the story are invented.</a:t>
+              <a:t>Audio: synthetic voices, computer-generated (Chatterbox TTS cloned from Kokoro-82M reference clips). No recordings of real people. The names and the story are invented.</a:t>
             </a:r>
           </a:p>
           <a:p>
@@ -1502,101 +1502,6 @@
           <a:p>
             <a:r>
               <a:t>Picture: Twemoji graphics by Twitter, Inc. and other contributors (https://github.com/jdecked/twemoji), CC BY 4.0 (https://creativecommons.org/licenses/by/4.0/); resized and combined, with signs and labels (images/CREDITS.md).</a:t>
-            </a:r>
-          </a:p>
-          <a:p>
-            <a:r>
-              <a:t>Listening script (the audio is coming soon; until then, read it aloud with a volunteer at a normal, friendly speed):</a:t>
-            </a:r>
-          </a:p>
-          <a:p>
-            <a:r>
-              <a:t>Narrator: Lesson twelve. Mrs. Lopez gets a phone call. Later, she talks to her son, Daniel.</a:t>
-            </a:r>
-          </a:p>
-          <a:p>
-            <a:r>
-              <a:t>Caller: Hello, is this Mrs. Lopez? This is Mike from the electric company. Your bill is late. You must pay today, or we're going to turn off your power in one hour.</a:t>
-            </a:r>
-          </a:p>
-          <a:p>
-            <a:r>
-              <a:t>Mrs. Lopez: What? My bill is late? I paid it last week.</a:t>
-            </a:r>
-          </a:p>
-          <a:p>
-            <a:r>
-              <a:t>Caller: No, ma'am. You owe two hundred dollars. Go to the store and buy gift cards. Then call me back and read me the numbers.</a:t>
-            </a:r>
-          </a:p>
-          <a:p>
-            <a:r>
-              <a:t>Mrs. Lopez: Gift cards? That's strange.</a:t>
-            </a:r>
-          </a:p>
-          <a:p>
-            <a:r>
-              <a:t>Caller: Please hurry. This is your last chance. Don't tell anyone.</a:t>
-            </a:r>
-          </a:p>
-          <a:p>
-            <a:r>
-              <a:t>Mrs. Lopez: No, thank you. I'm going to call the number that is on my real bill. Goodbye.</a:t>
-            </a:r>
-          </a:p>
-          <a:p>
-            <a:r>
-              <a:t>Daniel: Hi, Mom. You look worried. What's wrong?</a:t>
-            </a:r>
-          </a:p>
-          <a:p>
-            <a:r>
-              <a:t>Mrs. Lopez: The man who called me knew my name. He said he was from the electric company. He wanted me to pay with gift cards.</a:t>
-            </a:r>
-          </a:p>
-          <a:p>
-            <a:r>
-              <a:t>Daniel: Gift cards? That's a warning sign. A company that asks for gift cards is a scam. What did you do?</a:t>
-            </a:r>
-          </a:p>
-          <a:p>
-            <a:r>
-              <a:t>Mrs. Lopez: I said no, and I hung up.</a:t>
-            </a:r>
-          </a:p>
-          <a:p>
-            <a:r>
-              <a:t>Daniel: Good! You did the right thing. Scammers are people who want your money. Did you give him any information?</a:t>
-            </a:r>
-          </a:p>
-          <a:p>
-            <a:r>
-              <a:t>Mrs. Lopez: No. I didn't tell him anything.</a:t>
-            </a:r>
-          </a:p>
-          <a:p>
-            <a:r>
-              <a:t>Daniel: Great. Let's check your account on the City Power website. OK, here it is. Your account is fine. You don't owe any money.</a:t>
-            </a:r>
-          </a:p>
-          <a:p>
-            <a:r>
-              <a:t>Mrs. Lopez: Oh, good. I'm glad I didn't pay.</a:t>
-            </a:r>
-          </a:p>
-          <a:p>
-            <a:r>
-              <a:t>Daniel: Me too. Next time, you can block the number. Be careful with texts that ask for your password, too. And never trust a caller who tells you to hurry.</a:t>
-            </a:r>
-          </a:p>
-          <a:p>
-            <a:r>
-              <a:t>Mrs. Lopez: You're right. Thanks, Daniel.</a:t>
-            </a:r>
-          </a:p>
-          <a:p>
-            <a:r>
-              <a:t>Narrator: That's the end of the listening.</a:t>
             </a:r>
           </a:p>
         </p:txBody>
@@ -12042,7 +11947,7 @@
                 <a:ea typeface="Lexend Deca" pitchFamily="34" charset="-122"/>
                 <a:cs typeface="Lexend Deca" pitchFamily="34" charset="-120"/>
               </a:rPr>
-              <a:t>Audio (about 1:56): coming soon.</a:t>
+              <a:t>Audio: about 2:01. It plays once.</a:t>
             </a:r>
             <a:endParaRPr lang="en-US" sz="2200" dirty="0"/>
           </a:p>
@@ -31018,7 +30923,7 @@
                 <a:ea typeface="Lexend Deca" pitchFamily="34" charset="-122"/>
                 <a:cs typeface="Lexend Deca" pitchFamily="34" charset="-120"/>
               </a:rPr>
-              <a:t>Audio (coming soon): synthetic voices made with Chatterbox TTS (MIT License), cloned from short synthetic reference clips made with Kokoro-82M (Apache License 2.0). No recordings of real people. Each file will carry an inaudible Perth watermark marking it as AI-generated. Font: Lexend Deca (OFL 1.1).</a:t>
+              <a:t>Audio: synthetic voices made with Chatterbox TTS (MIT License), cloned from short synthetic reference clips made with Kokoro-82M (Apache License 2.0). No recordings of real people were used. Each file carries an inaudible Perth watermark marking it as AI-generated. Font: Lexend Deca (OFL 1.1).</a:t>
             </a:r>
             <a:endParaRPr lang="en-US" sz="1350" dirty="0" b="0"/>
           </a:p>

--- a/level4/slides/Level4_Lesson12_Slides.pptx
+++ b/level4/slides/Level4_Lesson12_Slides.pptx
@@ -1047,6 +1047,11 @@
           <a:p>
             <a:r>
               <a:t>Reductions: the listening says going to. People often say gonna. Learners only need to recognize it.</a:t>
+            </a:r>
+          </a:p>
+          <a:p>
+            <a:r>
+              <a:t>Everyday English: people often say gonna (going to) and wanna (want to). Learners will hear them often. They are fine in casual talk; in writing, at a job interview, or in a formal email, use going to and want to. The listening uses the full forms.</a:t>
             </a:r>
           </a:p>
           <a:p>
@@ -16380,7 +16385,7 @@
                 <a:ea typeface="Lexend Deca" pitchFamily="34" charset="-122"/>
                 <a:cs typeface="Lexend Deca" pitchFamily="34" charset="-120"/>
               </a:rPr>
-              <a:t> is a short form. This listening says </a:t>
+              <a:t> = going to, </a:t>
             </a:r>
             <a:r>
               <a:rPr lang="en-US" sz="2000" dirty="0" b="1">
@@ -16391,7 +16396,7 @@
                 <a:ea typeface="Lexend Deca" pitchFamily="34" charset="-122"/>
                 <a:cs typeface="Lexend Deca" pitchFamily="34" charset="-120"/>
               </a:rPr>
-              <a:t>going to</a:t>
+              <a:t>wanna</a:t>
             </a:r>
             <a:r>
               <a:rPr lang="en-US" sz="2000" dirty="0">
@@ -16402,7 +16407,7 @@
                 <a:ea typeface="Lexend Deca" pitchFamily="34" charset="-122"/>
                 <a:cs typeface="Lexend Deca" pitchFamily="34" charset="-120"/>
               </a:rPr>
-              <a:t>.</a:t>
+              <a:t> = want to: fine in everyday talk.</a:t>
             </a:r>
             <a:endParaRPr lang="en-US" sz="2000" dirty="0"/>
           </a:p>
